--- a/docs/images/aws/05-vpc.pptx
+++ b/docs/images/aws/05-vpc.pptx
@@ -4,6 +4,9 @@
   <p:sldMasterIdLst>
     <p:sldMasterId id="2147483648" r:id="rId1"/>
   </p:sldMasterIdLst>
+  <p:notesMasterIdLst>
+    <p:notesMasterId r:id="rId3"/>
+  </p:notesMasterIdLst>
   <p:sldIdLst>
     <p:sldId id="256" r:id="rId2"/>
   </p:sldIdLst>
@@ -104,7 +107,445 @@
       </a:defRPr>
     </a:lvl9pPr>
   </p:defaultTextStyle>
+  <p:extLst>
+    <p:ext uri="{EFAFB233-063F-42B5-8137-9DF3F51BA10A}">
+      <p15:sldGuideLst xmlns:p15="http://schemas.microsoft.com/office/powerpoint/2012/main"/>
+    </p:ext>
+  </p:extLst>
 </p:presentation>
+</file>
+
+<file path=ppt/notesMasters/notesMaster1.xml><?xml version="1.0" encoding="utf-8"?>
+<p:notesMaster xmlns:a="http://schemas.openxmlformats.org/drawingml/2006/main" xmlns:r="http://schemas.openxmlformats.org/officeDocument/2006/relationships" xmlns:p="http://schemas.openxmlformats.org/presentationml/2006/main">
+  <p:cSld>
+    <p:bg>
+      <p:bgRef idx="1001">
+        <a:schemeClr val="bg1"/>
+      </p:bgRef>
+    </p:bg>
+    <p:spTree>
+      <p:nvGrpSpPr>
+        <p:cNvPr id="1" name=""/>
+        <p:cNvGrpSpPr/>
+        <p:nvPr/>
+      </p:nvGrpSpPr>
+      <p:grpSpPr>
+        <a:xfrm>
+          <a:off x="0" y="0"/>
+          <a:ext cx="0" cy="0"/>
+          <a:chOff x="0" y="0"/>
+          <a:chExt cx="0" cy="0"/>
+        </a:xfrm>
+      </p:grpSpPr>
+      <p:sp>
+        <p:nvSpPr>
+          <p:cNvPr id="2" name="머리글 개체 틀 1"/>
+          <p:cNvSpPr>
+            <a:spLocks noGrp="1"/>
+          </p:cNvSpPr>
+          <p:nvPr>
+            <p:ph type="hdr" sz="quarter"/>
+          </p:nvPr>
+        </p:nvSpPr>
+        <p:spPr>
+          <a:xfrm>
+            <a:off x="0" y="0"/>
+            <a:ext cx="2971800" cy="458788"/>
+          </a:xfrm>
+          <a:prstGeom prst="rect">
+            <a:avLst/>
+          </a:prstGeom>
+        </p:spPr>
+        <p:txBody>
+          <a:bodyPr vert="horz" lIns="91440" tIns="45720" rIns="91440" bIns="45720" rtlCol="0"/>
+          <a:lstStyle>
+            <a:lvl1pPr algn="l">
+              <a:defRPr sz="1200"/>
+            </a:lvl1pPr>
+          </a:lstStyle>
+          <a:p>
+            <a:endParaRPr lang="ko-KR" altLang="en-US"/>
+          </a:p>
+        </p:txBody>
+      </p:sp>
+      <p:sp>
+        <p:nvSpPr>
+          <p:cNvPr id="3" name="날짜 개체 틀 2"/>
+          <p:cNvSpPr>
+            <a:spLocks noGrp="1"/>
+          </p:cNvSpPr>
+          <p:nvPr>
+            <p:ph type="dt" idx="1"/>
+          </p:nvPr>
+        </p:nvSpPr>
+        <p:spPr>
+          <a:xfrm>
+            <a:off x="3884613" y="0"/>
+            <a:ext cx="2971800" cy="458788"/>
+          </a:xfrm>
+          <a:prstGeom prst="rect">
+            <a:avLst/>
+          </a:prstGeom>
+        </p:spPr>
+        <p:txBody>
+          <a:bodyPr vert="horz" lIns="91440" tIns="45720" rIns="91440" bIns="45720" rtlCol="0"/>
+          <a:lstStyle>
+            <a:lvl1pPr algn="r">
+              <a:defRPr sz="1200"/>
+            </a:lvl1pPr>
+          </a:lstStyle>
+          <a:p>
+            <a:fld id="{2DDE412F-1E62-43E9-8C4D-B0A8061DB94C}" type="datetimeFigureOut">
+              <a:rPr lang="ko-KR" altLang="en-US" smtClean="0"/>
+              <a:t>2026-08-13</a:t>
+            </a:fld>
+            <a:endParaRPr lang="ko-KR" altLang="en-US"/>
+          </a:p>
+        </p:txBody>
+      </p:sp>
+      <p:sp>
+        <p:nvSpPr>
+          <p:cNvPr id="4" name="슬라이드 이미지 개체 틀 3"/>
+          <p:cNvSpPr>
+            <a:spLocks noGrp="1" noRot="1" noChangeAspect="1"/>
+          </p:cNvSpPr>
+          <p:nvPr>
+            <p:ph type="sldImg" idx="2"/>
+          </p:nvPr>
+        </p:nvSpPr>
+        <p:spPr>
+          <a:xfrm>
+            <a:off x="685800" y="1143000"/>
+            <a:ext cx="5486400" cy="3086100"/>
+          </a:xfrm>
+          <a:prstGeom prst="rect">
+            <a:avLst/>
+          </a:prstGeom>
+          <a:noFill/>
+          <a:ln w="12700">
+            <a:solidFill>
+              <a:prstClr val="black"/>
+            </a:solidFill>
+          </a:ln>
+        </p:spPr>
+        <p:txBody>
+          <a:bodyPr vert="horz" lIns="91440" tIns="45720" rIns="91440" bIns="45720" rtlCol="0" anchor="ctr"/>
+          <a:lstStyle/>
+          <a:p>
+            <a:endParaRPr lang="ko-KR" altLang="en-US"/>
+          </a:p>
+        </p:txBody>
+      </p:sp>
+      <p:sp>
+        <p:nvSpPr>
+          <p:cNvPr id="5" name="슬라이드 노트 개체 틀 4"/>
+          <p:cNvSpPr>
+            <a:spLocks noGrp="1"/>
+          </p:cNvSpPr>
+          <p:nvPr>
+            <p:ph type="body" sz="quarter" idx="3"/>
+          </p:nvPr>
+        </p:nvSpPr>
+        <p:spPr>
+          <a:xfrm>
+            <a:off x="685800" y="4400550"/>
+            <a:ext cx="5486400" cy="3600450"/>
+          </a:xfrm>
+          <a:prstGeom prst="rect">
+            <a:avLst/>
+          </a:prstGeom>
+        </p:spPr>
+        <p:txBody>
+          <a:bodyPr vert="horz" lIns="91440" tIns="45720" rIns="91440" bIns="45720" rtlCol="0"/>
+          <a:lstStyle/>
+          <a:p>
+            <a:pPr lvl="0"/>
+            <a:r>
+              <a:rPr lang="ko-KR" altLang="en-US"/>
+              <a:t>마스터 텍스트 스타일을 편집하려면 클릭</a:t>
+            </a:r>
+          </a:p>
+          <a:p>
+            <a:pPr lvl="1"/>
+            <a:r>
+              <a:rPr lang="ko-KR" altLang="en-US"/>
+              <a:t>두 번째 수준</a:t>
+            </a:r>
+          </a:p>
+          <a:p>
+            <a:pPr lvl="2"/>
+            <a:r>
+              <a:rPr lang="ko-KR" altLang="en-US"/>
+              <a:t>세 번째 수준</a:t>
+            </a:r>
+          </a:p>
+          <a:p>
+            <a:pPr lvl="3"/>
+            <a:r>
+              <a:rPr lang="ko-KR" altLang="en-US"/>
+              <a:t>네 번째 수준</a:t>
+            </a:r>
+          </a:p>
+          <a:p>
+            <a:pPr lvl="4"/>
+            <a:r>
+              <a:rPr lang="ko-KR" altLang="en-US"/>
+              <a:t>다섯 번째 수준</a:t>
+            </a:r>
+          </a:p>
+        </p:txBody>
+      </p:sp>
+      <p:sp>
+        <p:nvSpPr>
+          <p:cNvPr id="6" name="바닥글 개체 틀 5"/>
+          <p:cNvSpPr>
+            <a:spLocks noGrp="1"/>
+          </p:cNvSpPr>
+          <p:nvPr>
+            <p:ph type="ftr" sz="quarter" idx="4"/>
+          </p:nvPr>
+        </p:nvSpPr>
+        <p:spPr>
+          <a:xfrm>
+            <a:off x="0" y="8685213"/>
+            <a:ext cx="2971800" cy="458787"/>
+          </a:xfrm>
+          <a:prstGeom prst="rect">
+            <a:avLst/>
+          </a:prstGeom>
+        </p:spPr>
+        <p:txBody>
+          <a:bodyPr vert="horz" lIns="91440" tIns="45720" rIns="91440" bIns="45720" rtlCol="0" anchor="b"/>
+          <a:lstStyle>
+            <a:lvl1pPr algn="l">
+              <a:defRPr sz="1200"/>
+            </a:lvl1pPr>
+          </a:lstStyle>
+          <a:p>
+            <a:endParaRPr lang="ko-KR" altLang="en-US"/>
+          </a:p>
+        </p:txBody>
+      </p:sp>
+      <p:sp>
+        <p:nvSpPr>
+          <p:cNvPr id="7" name="슬라이드 번호 개체 틀 6"/>
+          <p:cNvSpPr>
+            <a:spLocks noGrp="1"/>
+          </p:cNvSpPr>
+          <p:nvPr>
+            <p:ph type="sldNum" sz="quarter" idx="5"/>
+          </p:nvPr>
+        </p:nvSpPr>
+        <p:spPr>
+          <a:xfrm>
+            <a:off x="3884613" y="8685213"/>
+            <a:ext cx="2971800" cy="458787"/>
+          </a:xfrm>
+          <a:prstGeom prst="rect">
+            <a:avLst/>
+          </a:prstGeom>
+        </p:spPr>
+        <p:txBody>
+          <a:bodyPr vert="horz" lIns="91440" tIns="45720" rIns="91440" bIns="45720" rtlCol="0" anchor="b"/>
+          <a:lstStyle>
+            <a:lvl1pPr algn="r">
+              <a:defRPr sz="1200"/>
+            </a:lvl1pPr>
+          </a:lstStyle>
+          <a:p>
+            <a:fld id="{586EAB53-8D64-4FE3-A20E-4ED380AAF608}" type="slidenum">
+              <a:rPr lang="ko-KR" altLang="en-US" smtClean="0"/>
+              <a:t>‹#›</a:t>
+            </a:fld>
+            <a:endParaRPr lang="ko-KR" altLang="en-US"/>
+          </a:p>
+        </p:txBody>
+      </p:sp>
+    </p:spTree>
+    <p:extLst>
+      <p:ext uri="{BB962C8B-B14F-4D97-AF65-F5344CB8AC3E}">
+        <p14:creationId xmlns:p14="http://schemas.microsoft.com/office/powerpoint/2010/main" val="1950475421"/>
+      </p:ext>
+    </p:extLst>
+  </p:cSld>
+  <p:clrMap bg1="lt1" tx1="dk1" bg2="lt2" tx2="dk2" accent1="accent1" accent2="accent2" accent3="accent3" accent4="accent4" accent5="accent5" accent6="accent6" hlink="hlink" folHlink="folHlink"/>
+  <p:notesStyle>
+    <a:lvl1pPr marL="0" algn="l" defTabSz="914400" rtl="0" eaLnBrk="1" latinLnBrk="1" hangingPunct="1">
+      <a:defRPr sz="1200" kern="1200">
+        <a:solidFill>
+          <a:schemeClr val="tx1"/>
+        </a:solidFill>
+        <a:latin typeface="+mn-lt"/>
+        <a:ea typeface="+mn-ea"/>
+        <a:cs typeface="+mn-cs"/>
+      </a:defRPr>
+    </a:lvl1pPr>
+    <a:lvl2pPr marL="457200" algn="l" defTabSz="914400" rtl="0" eaLnBrk="1" latinLnBrk="1" hangingPunct="1">
+      <a:defRPr sz="1200" kern="1200">
+        <a:solidFill>
+          <a:schemeClr val="tx1"/>
+        </a:solidFill>
+        <a:latin typeface="+mn-lt"/>
+        <a:ea typeface="+mn-ea"/>
+        <a:cs typeface="+mn-cs"/>
+      </a:defRPr>
+    </a:lvl2pPr>
+    <a:lvl3pPr marL="914400" algn="l" defTabSz="914400" rtl="0" eaLnBrk="1" latinLnBrk="1" hangingPunct="1">
+      <a:defRPr sz="1200" kern="1200">
+        <a:solidFill>
+          <a:schemeClr val="tx1"/>
+        </a:solidFill>
+        <a:latin typeface="+mn-lt"/>
+        <a:ea typeface="+mn-ea"/>
+        <a:cs typeface="+mn-cs"/>
+      </a:defRPr>
+    </a:lvl3pPr>
+    <a:lvl4pPr marL="1371600" algn="l" defTabSz="914400" rtl="0" eaLnBrk="1" latinLnBrk="1" hangingPunct="1">
+      <a:defRPr sz="1200" kern="1200">
+        <a:solidFill>
+          <a:schemeClr val="tx1"/>
+        </a:solidFill>
+        <a:latin typeface="+mn-lt"/>
+        <a:ea typeface="+mn-ea"/>
+        <a:cs typeface="+mn-cs"/>
+      </a:defRPr>
+    </a:lvl4pPr>
+    <a:lvl5pPr marL="1828800" algn="l" defTabSz="914400" rtl="0" eaLnBrk="1" latinLnBrk="1" hangingPunct="1">
+      <a:defRPr sz="1200" kern="1200">
+        <a:solidFill>
+          <a:schemeClr val="tx1"/>
+        </a:solidFill>
+        <a:latin typeface="+mn-lt"/>
+        <a:ea typeface="+mn-ea"/>
+        <a:cs typeface="+mn-cs"/>
+      </a:defRPr>
+    </a:lvl5pPr>
+    <a:lvl6pPr marL="2286000" algn="l" defTabSz="914400" rtl="0" eaLnBrk="1" latinLnBrk="1" hangingPunct="1">
+      <a:defRPr sz="1200" kern="1200">
+        <a:solidFill>
+          <a:schemeClr val="tx1"/>
+        </a:solidFill>
+        <a:latin typeface="+mn-lt"/>
+        <a:ea typeface="+mn-ea"/>
+        <a:cs typeface="+mn-cs"/>
+      </a:defRPr>
+    </a:lvl6pPr>
+    <a:lvl7pPr marL="2743200" algn="l" defTabSz="914400" rtl="0" eaLnBrk="1" latinLnBrk="1" hangingPunct="1">
+      <a:defRPr sz="1200" kern="1200">
+        <a:solidFill>
+          <a:schemeClr val="tx1"/>
+        </a:solidFill>
+        <a:latin typeface="+mn-lt"/>
+        <a:ea typeface="+mn-ea"/>
+        <a:cs typeface="+mn-cs"/>
+      </a:defRPr>
+    </a:lvl7pPr>
+    <a:lvl8pPr marL="3200400" algn="l" defTabSz="914400" rtl="0" eaLnBrk="1" latinLnBrk="1" hangingPunct="1">
+      <a:defRPr sz="1200" kern="1200">
+        <a:solidFill>
+          <a:schemeClr val="tx1"/>
+        </a:solidFill>
+        <a:latin typeface="+mn-lt"/>
+        <a:ea typeface="+mn-ea"/>
+        <a:cs typeface="+mn-cs"/>
+      </a:defRPr>
+    </a:lvl8pPr>
+    <a:lvl9pPr marL="3657600" algn="l" defTabSz="914400" rtl="0" eaLnBrk="1" latinLnBrk="1" hangingPunct="1">
+      <a:defRPr sz="1200" kern="1200">
+        <a:solidFill>
+          <a:schemeClr val="tx1"/>
+        </a:solidFill>
+        <a:latin typeface="+mn-lt"/>
+        <a:ea typeface="+mn-ea"/>
+        <a:cs typeface="+mn-cs"/>
+      </a:defRPr>
+    </a:lvl9pPr>
+  </p:notesStyle>
+</p:notesMaster>
+</file>
+
+<file path=ppt/notesSlides/notesSlide1.xml><?xml version="1.0" encoding="utf-8"?>
+<p:notes xmlns:a="http://schemas.openxmlformats.org/drawingml/2006/main" xmlns:r="http://schemas.openxmlformats.org/officeDocument/2006/relationships" xmlns:p="http://schemas.openxmlformats.org/presentationml/2006/main">
+  <p:cSld>
+    <p:spTree>
+      <p:nvGrpSpPr>
+        <p:cNvPr id="1" name=""/>
+        <p:cNvGrpSpPr/>
+        <p:nvPr/>
+      </p:nvGrpSpPr>
+      <p:grpSpPr>
+        <a:xfrm>
+          <a:off x="0" y="0"/>
+          <a:ext cx="0" cy="0"/>
+          <a:chOff x="0" y="0"/>
+          <a:chExt cx="0" cy="0"/>
+        </a:xfrm>
+      </p:grpSpPr>
+      <p:sp>
+        <p:nvSpPr>
+          <p:cNvPr id="2" name="슬라이드 이미지 개체 틀 1"/>
+          <p:cNvSpPr>
+            <a:spLocks noGrp="1" noRot="1" noChangeAspect="1"/>
+          </p:cNvSpPr>
+          <p:nvPr>
+            <p:ph type="sldImg"/>
+          </p:nvPr>
+        </p:nvSpPr>
+        <p:spPr/>
+      </p:sp>
+      <p:sp>
+        <p:nvSpPr>
+          <p:cNvPr id="3" name="슬라이드 노트 개체 틀 2"/>
+          <p:cNvSpPr>
+            <a:spLocks noGrp="1"/>
+          </p:cNvSpPr>
+          <p:nvPr>
+            <p:ph type="body" idx="1"/>
+          </p:nvPr>
+        </p:nvSpPr>
+        <p:spPr/>
+        <p:txBody>
+          <a:bodyPr/>
+          <a:lstStyle/>
+          <a:p>
+            <a:endParaRPr lang="ko-KR" altLang="en-US" dirty="0"/>
+          </a:p>
+        </p:txBody>
+      </p:sp>
+      <p:sp>
+        <p:nvSpPr>
+          <p:cNvPr id="4" name="슬라이드 번호 개체 틀 3"/>
+          <p:cNvSpPr>
+            <a:spLocks noGrp="1"/>
+          </p:cNvSpPr>
+          <p:nvPr>
+            <p:ph type="sldNum" sz="quarter" idx="5"/>
+          </p:nvPr>
+        </p:nvSpPr>
+        <p:spPr/>
+        <p:txBody>
+          <a:bodyPr/>
+          <a:lstStyle/>
+          <a:p>
+            <a:fld id="{586EAB53-8D64-4FE3-A20E-4ED380AAF608}" type="slidenum">
+              <a:rPr lang="ko-KR" altLang="en-US" smtClean="0"/>
+              <a:t>1</a:t>
+            </a:fld>
+            <a:endParaRPr lang="ko-KR" altLang="en-US"/>
+          </a:p>
+        </p:txBody>
+      </p:sp>
+    </p:spTree>
+    <p:extLst>
+      <p:ext uri="{BB962C8B-B14F-4D97-AF65-F5344CB8AC3E}">
+        <p14:creationId xmlns:p14="http://schemas.microsoft.com/office/powerpoint/2010/main" val="741775349"/>
+      </p:ext>
+    </p:extLst>
+  </p:cSld>
+  <p:clrMapOvr>
+    <a:masterClrMapping/>
+  </p:clrMapOvr>
+</p:notes>
 </file>
 
 <file path=ppt/slideLayouts/slideLayout1.xml><?xml version="1.0" encoding="utf-8"?>
@@ -3429,10 +3870,10 @@
             <p:nvPr/>
           </p:nvPicPr>
           <p:blipFill>
-            <a:blip r:embed="rId2">
+            <a:blip r:embed="rId3">
               <a:extLst>
                 <a:ext uri="{96DAC541-7B7A-43D3-8B79-37D633B846F1}">
-                  <asvg:svgBlip xmlns:asvg="http://schemas.microsoft.com/office/drawing/2016/SVG/main" r:embed="rId3"/>
+                  <asvg:svgBlip xmlns:asvg="http://schemas.microsoft.com/office/drawing/2016/SVG/main" r:embed="rId4"/>
                 </a:ext>
               </a:extLst>
             </a:blip>
@@ -3574,10 +4015,10 @@
             <p:nvPr/>
           </p:nvPicPr>
           <p:blipFill>
-            <a:blip r:embed="rId4">
+            <a:blip r:embed="rId5">
               <a:extLst>
                 <a:ext uri="{96DAC541-7B7A-43D3-8B79-37D633B846F1}">
-                  <asvg:svgBlip xmlns:asvg="http://schemas.microsoft.com/office/drawing/2016/SVG/main" r:embed="rId5"/>
+                  <asvg:svgBlip xmlns:asvg="http://schemas.microsoft.com/office/drawing/2016/SVG/main" r:embed="rId6"/>
                 </a:ext>
               </a:extLst>
             </a:blip>
@@ -4619,10 +5060,10 @@
         </p:nvGrpSpPr>
         <p:grpSpPr>
           <a:xfrm>
-            <a:off x="5796038" y="2445737"/>
-            <a:ext cx="987402" cy="881026"/>
-            <a:chOff x="8457070" y="1443459"/>
-            <a:chExt cx="987402" cy="881026"/>
+            <a:off x="5584088" y="2445737"/>
+            <a:ext cx="1199352" cy="711749"/>
+            <a:chOff x="8245120" y="1443459"/>
+            <a:chExt cx="1199352" cy="711749"/>
           </a:xfrm>
         </p:grpSpPr>
         <p:sp>
@@ -4641,8 +5082,8 @@
           </p:nvSpPr>
           <p:spPr bwMode="auto">
             <a:xfrm>
-              <a:off x="8457070" y="1724321"/>
-              <a:ext cx="987402" cy="600164"/>
+              <a:off x="8245120" y="1724321"/>
+              <a:ext cx="1199352" cy="430887"/>
             </a:xfrm>
             <a:prstGeom prst="rect">
               <a:avLst/>
@@ -4781,32 +5222,19 @@
                   <a:ea typeface="Amazon Ember" panose="020B0603020204020204" pitchFamily="34" charset="0"/>
                   <a:cs typeface="Arial" panose="020B0604020202020204" pitchFamily="34" charset="0"/>
                 </a:rPr>
-                <a:t>Elastic </a:t>
-              </a:r>
-              <a:r>
-                <a:rPr lang="en-US" altLang="en-US" sz="1100">
-                  <a:latin typeface="Arial" panose="020B0604020202020204" pitchFamily="34" charset="0"/>
-                  <a:ea typeface="Amazon Ember" panose="020B0603020204020204" pitchFamily="34" charset="0"/>
-                  <a:cs typeface="Arial" panose="020B0604020202020204" pitchFamily="34" charset="0"/>
-                </a:rPr>
-                <a:t>IP address</a:t>
+                <a:t>Elastic IP address</a:t>
               </a:r>
             </a:p>
             <a:p>
               <a:pPr algn="ctr" eaLnBrk="1" hangingPunct="1"/>
               <a:r>
-                <a:rPr lang="en-US" altLang="en-US" sz="1100">
+                <a:rPr lang="en-US" altLang="en-US" sz="1100" dirty="0">
                   <a:latin typeface="Arial" panose="020B0604020202020204" pitchFamily="34" charset="0"/>
                   <a:ea typeface="Amazon Ember" panose="020B0603020204020204" pitchFamily="34" charset="0"/>
                   <a:cs typeface="Arial" panose="020B0604020202020204" pitchFamily="34" charset="0"/>
                 </a:rPr>
                 <a:t>(3.4.5.6)</a:t>
               </a:r>
-              <a:endParaRPr lang="en-US" altLang="en-US" sz="1100" dirty="0">
-                <a:latin typeface="Arial" panose="020B0604020202020204" pitchFamily="34" charset="0"/>
-                <a:ea typeface="Amazon Ember" panose="020B0603020204020204" pitchFamily="34" charset="0"/>
-                <a:cs typeface="Arial" panose="020B0604020202020204" pitchFamily="34" charset="0"/>
-              </a:endParaRPr>
             </a:p>
           </p:txBody>
         </p:sp>
@@ -4825,10 +5253,10 @@
             <p:nvPr/>
           </p:nvPicPr>
           <p:blipFill>
-            <a:blip r:embed="rId6">
+            <a:blip r:embed="rId7">
               <a:extLst>
                 <a:ext uri="{96DAC541-7B7A-43D3-8B79-37D633B846F1}">
-                  <asvg:svgBlip xmlns:asvg="http://schemas.microsoft.com/office/drawing/2016/SVG/main" r:embed="rId7"/>
+                  <asvg:svgBlip xmlns:asvg="http://schemas.microsoft.com/office/drawing/2016/SVG/main" r:embed="rId8"/>
                 </a:ext>
               </a:extLst>
             </a:blip>
@@ -4930,10 +5358,10 @@
           <p:nvPr/>
         </p:nvPicPr>
         <p:blipFill>
-          <a:blip r:embed="rId8">
+          <a:blip r:embed="rId9">
             <a:extLst>
               <a:ext uri="{96DAC541-7B7A-43D3-8B79-37D633B846F1}">
-                <asvg:svgBlip xmlns:asvg="http://schemas.microsoft.com/office/drawing/2016/SVG/main" r:embed="rId9"/>
+                <asvg:svgBlip xmlns:asvg="http://schemas.microsoft.com/office/drawing/2016/SVG/main" r:embed="rId10"/>
               </a:ext>
             </a:extLst>
           </a:blip>
@@ -5096,10 +5524,10 @@
             <p:nvPr/>
           </p:nvPicPr>
           <p:blipFill>
-            <a:blip r:embed="rId8">
+            <a:blip r:embed="rId9">
               <a:extLst>
                 <a:ext uri="{96DAC541-7B7A-43D3-8B79-37D633B846F1}">
-                  <asvg:svgBlip xmlns:asvg="http://schemas.microsoft.com/office/drawing/2016/SVG/main" r:embed="rId9"/>
+                  <asvg:svgBlip xmlns:asvg="http://schemas.microsoft.com/office/drawing/2016/SVG/main" r:embed="rId10"/>
                 </a:ext>
               </a:extLst>
             </a:blip>
@@ -5154,10 +5582,10 @@
             <p:nvPr/>
           </p:nvPicPr>
           <p:blipFill>
-            <a:blip r:embed="rId10">
+            <a:blip r:embed="rId11">
               <a:extLst>
                 <a:ext uri="{96DAC541-7B7A-43D3-8B79-37D633B846F1}">
-                  <asvg:svgBlip xmlns:asvg="http://schemas.microsoft.com/office/drawing/2016/SVG/main" r:embed="rId11"/>
+                  <asvg:svgBlip xmlns:asvg="http://schemas.microsoft.com/office/drawing/2016/SVG/main" r:embed="rId12"/>
                 </a:ext>
               </a:extLst>
             </a:blip>
@@ -5445,10 +5873,10 @@
             <p:nvPr/>
           </p:nvPicPr>
           <p:blipFill>
-            <a:blip r:embed="rId8">
+            <a:blip r:embed="rId9">
               <a:extLst>
                 <a:ext uri="{96DAC541-7B7A-43D3-8B79-37D633B846F1}">
-                  <asvg:svgBlip xmlns:asvg="http://schemas.microsoft.com/office/drawing/2016/SVG/main" r:embed="rId9"/>
+                  <asvg:svgBlip xmlns:asvg="http://schemas.microsoft.com/office/drawing/2016/SVG/main" r:embed="rId10"/>
                 </a:ext>
               </a:extLst>
             </a:blip>
@@ -6028,10 +6456,10 @@
             <p:nvPr/>
           </p:nvPicPr>
           <p:blipFill>
-            <a:blip r:embed="rId12">
+            <a:blip r:embed="rId13">
               <a:extLst>
                 <a:ext uri="{96DAC541-7B7A-43D3-8B79-37D633B846F1}">
-                  <asvg:svgBlip xmlns:asvg="http://schemas.microsoft.com/office/drawing/2016/SVG/main" r:embed="rId13"/>
+                  <asvg:svgBlip xmlns:asvg="http://schemas.microsoft.com/office/drawing/2016/SVG/main" r:embed="rId14"/>
                 </a:ext>
               </a:extLst>
             </a:blip>
@@ -6107,7 +6535,7 @@
             <p:nvPr/>
           </p:nvPicPr>
           <p:blipFill>
-            <a:blip r:embed="rId14" cstate="hqprint">
+            <a:blip r:embed="rId15" cstate="hqprint">
               <a:extLst>
                 <a:ext uri="{28A0092B-C50C-407E-A947-70E740481C1C}">
                   <a14:useLocalDpi xmlns:a14="http://schemas.microsoft.com/office/drawing/2010/main" val="0"/>
@@ -6910,10 +7338,10 @@
             <p:nvPr/>
           </p:nvPicPr>
           <p:blipFill>
-            <a:blip r:embed="rId15">
+            <a:blip r:embed="rId16">
               <a:extLst>
                 <a:ext uri="{96DAC541-7B7A-43D3-8B79-37D633B846F1}">
-                  <asvg:svgBlip xmlns:asvg="http://schemas.microsoft.com/office/drawing/2016/SVG/main" r:embed="rId16"/>
+                  <asvg:svgBlip xmlns:asvg="http://schemas.microsoft.com/office/drawing/2016/SVG/main" r:embed="rId17"/>
                 </a:ext>
               </a:extLst>
             </a:blip>
@@ -6989,10 +7417,10 @@
             <p:nvPr/>
           </p:nvPicPr>
           <p:blipFill>
-            <a:blip r:embed="rId10">
+            <a:blip r:embed="rId11">
               <a:extLst>
                 <a:ext uri="{96DAC541-7B7A-43D3-8B79-37D633B846F1}">
-                  <asvg:svgBlip xmlns:asvg="http://schemas.microsoft.com/office/drawing/2016/SVG/main" r:embed="rId11"/>
+                  <asvg:svgBlip xmlns:asvg="http://schemas.microsoft.com/office/drawing/2016/SVG/main" r:embed="rId12"/>
                 </a:ext>
               </a:extLst>
             </a:blip>
@@ -7047,10 +7475,10 @@
             <p:nvPr/>
           </p:nvPicPr>
           <p:blipFill>
-            <a:blip r:embed="rId10">
+            <a:blip r:embed="rId11">
               <a:extLst>
                 <a:ext uri="{96DAC541-7B7A-43D3-8B79-37D633B846F1}">
-                  <asvg:svgBlip xmlns:asvg="http://schemas.microsoft.com/office/drawing/2016/SVG/main" r:embed="rId11"/>
+                  <asvg:svgBlip xmlns:asvg="http://schemas.microsoft.com/office/drawing/2016/SVG/main" r:embed="rId12"/>
                 </a:ext>
               </a:extLst>
             </a:blip>
@@ -7105,10 +7533,10 @@
             <p:nvPr/>
           </p:nvPicPr>
           <p:blipFill>
-            <a:blip r:embed="rId10">
+            <a:blip r:embed="rId11">
               <a:extLst>
                 <a:ext uri="{96DAC541-7B7A-43D3-8B79-37D633B846F1}">
-                  <asvg:svgBlip xmlns:asvg="http://schemas.microsoft.com/office/drawing/2016/SVG/main" r:embed="rId11"/>
+                  <asvg:svgBlip xmlns:asvg="http://schemas.microsoft.com/office/drawing/2016/SVG/main" r:embed="rId12"/>
                 </a:ext>
               </a:extLst>
             </a:blip>
@@ -7163,10 +7591,10 @@
             <p:nvPr/>
           </p:nvPicPr>
           <p:blipFill>
-            <a:blip r:embed="rId10">
+            <a:blip r:embed="rId11">
               <a:extLst>
                 <a:ext uri="{96DAC541-7B7A-43D3-8B79-37D633B846F1}">
-                  <asvg:svgBlip xmlns:asvg="http://schemas.microsoft.com/office/drawing/2016/SVG/main" r:embed="rId11"/>
+                  <asvg:svgBlip xmlns:asvg="http://schemas.microsoft.com/office/drawing/2016/SVG/main" r:embed="rId12"/>
                 </a:ext>
               </a:extLst>
             </a:blip>
@@ -7491,10 +7919,10 @@
             <p:nvPr/>
           </p:nvPicPr>
           <p:blipFill>
-            <a:blip r:embed="rId17">
+            <a:blip r:embed="rId18">
               <a:extLst>
                 <a:ext uri="{96DAC541-7B7A-43D3-8B79-37D633B846F1}">
-                  <asvg:svgBlip xmlns:asvg="http://schemas.microsoft.com/office/drawing/2016/SVG/main" r:embed="rId18"/>
+                  <asvg:svgBlip xmlns:asvg="http://schemas.microsoft.com/office/drawing/2016/SVG/main" r:embed="rId19"/>
                 </a:ext>
               </a:extLst>
             </a:blip>
@@ -7658,7 +8086,7 @@
             <p:nvPr/>
           </p:nvPicPr>
           <p:blipFill>
-            <a:blip r:embed="rId19" cstate="hqprint">
+            <a:blip r:embed="rId20" cstate="hqprint">
               <a:extLst>
                 <a:ext uri="{28A0092B-C50C-407E-A947-70E740481C1C}">
                   <a14:useLocalDpi xmlns:a14="http://schemas.microsoft.com/office/drawing/2010/main" val="0"/>
@@ -7948,7 +8376,7 @@
             <p:nvPr/>
           </p:nvPicPr>
           <p:blipFill>
-            <a:blip r:embed="rId20" cstate="hqprint">
+            <a:blip r:embed="rId21" cstate="hqprint">
               <a:extLst>
                 <a:ext uri="{28A0092B-C50C-407E-A947-70E740481C1C}">
                   <a14:useLocalDpi xmlns:a14="http://schemas.microsoft.com/office/drawing/2010/main" val="0"/>
@@ -8419,10 +8847,10 @@
             <p:nvPr/>
           </p:nvPicPr>
           <p:blipFill>
-            <a:blip r:embed="rId21">
+            <a:blip r:embed="rId22">
               <a:extLst>
                 <a:ext uri="{96DAC541-7B7A-43D3-8B79-37D633B846F1}">
-                  <asvg:svgBlip xmlns:asvg="http://schemas.microsoft.com/office/drawing/2016/SVG/main" r:embed="rId22"/>
+                  <asvg:svgBlip xmlns:asvg="http://schemas.microsoft.com/office/drawing/2016/SVG/main" r:embed="rId23"/>
                 </a:ext>
               </a:extLst>
             </a:blip>
@@ -8867,7 +9295,7 @@
             <a:p>
               <a:pPr algn="ctr" eaLnBrk="1" hangingPunct="1"/>
               <a:r>
-                <a:rPr lang="en-US" altLang="en-US" sz="1100">
+                <a:rPr lang="en-US" altLang="en-US" sz="1100" dirty="0">
                   <a:latin typeface="Arial" panose="020B0604020202020204" pitchFamily="34" charset="0"/>
                   <a:ea typeface="Amazon Ember" panose="020B0603020204020204" pitchFamily="34" charset="0"/>
                   <a:cs typeface="Arial" panose="020B0604020202020204" pitchFamily="34" charset="0"/>
@@ -8878,18 +9306,13 @@
             <a:p>
               <a:pPr algn="ctr"/>
               <a:r>
-                <a:rPr lang="en-US" altLang="en-US" sz="1100">
+                <a:rPr lang="en-US" altLang="en-US" sz="1100" dirty="0">
                   <a:latin typeface="Arial" panose="020B0604020202020204" pitchFamily="34" charset="0"/>
                   <a:ea typeface="Amazon Ember" panose="020B0603020204020204" pitchFamily="34" charset="0"/>
                   <a:cs typeface="Arial" panose="020B0604020202020204" pitchFamily="34" charset="0"/>
                 </a:rPr>
                 <a:t>(10.0.0.10, 2.3.4.5 )</a:t>
               </a:r>
-              <a:endParaRPr lang="en-US" altLang="en-US" sz="1100" dirty="0">
-                <a:latin typeface="Arial" panose="020B0604020202020204" pitchFamily="34" charset="0"/>
-                <a:ea typeface="Amazon Ember" panose="020B0603020204020204" pitchFamily="34" charset="0"/>
-                <a:cs typeface="Arial" panose="020B0604020202020204" pitchFamily="34" charset="0"/>
-              </a:endParaRPr>
             </a:p>
           </p:txBody>
         </p:sp>
@@ -8908,10 +9331,10 @@
             <p:nvPr/>
           </p:nvPicPr>
           <p:blipFill>
-            <a:blip r:embed="rId10">
+            <a:blip r:embed="rId11">
               <a:extLst>
                 <a:ext uri="{96DAC541-7B7A-43D3-8B79-37D633B846F1}">
-                  <asvg:svgBlip xmlns:asvg="http://schemas.microsoft.com/office/drawing/2016/SVG/main" r:embed="rId11"/>
+                  <asvg:svgBlip xmlns:asvg="http://schemas.microsoft.com/office/drawing/2016/SVG/main" r:embed="rId12"/>
                 </a:ext>
               </a:extLst>
             </a:blip>
@@ -9051,10 +9474,10 @@
             <p:nvPr/>
           </p:nvPicPr>
           <p:blipFill>
-            <a:blip r:embed="rId23">
+            <a:blip r:embed="rId24">
               <a:extLst>
                 <a:ext uri="{96DAC541-7B7A-43D3-8B79-37D633B846F1}">
-                  <asvg:svgBlip xmlns:asvg="http://schemas.microsoft.com/office/drawing/2016/SVG/main" r:embed="rId24"/>
+                  <asvg:svgBlip xmlns:asvg="http://schemas.microsoft.com/office/drawing/2016/SVG/main" r:embed="rId25"/>
                 </a:ext>
               </a:extLst>
             </a:blip>
@@ -9392,10 +9815,10 @@
             <p:nvPr/>
           </p:nvPicPr>
           <p:blipFill>
-            <a:blip r:embed="rId25">
+            <a:blip r:embed="rId26">
               <a:extLst>
                 <a:ext uri="{96DAC541-7B7A-43D3-8B79-37D633B846F1}">
-                  <asvg:svgBlip xmlns:asvg="http://schemas.microsoft.com/office/drawing/2016/SVG/main" r:embed="rId26"/>
+                  <asvg:svgBlip xmlns:asvg="http://schemas.microsoft.com/office/drawing/2016/SVG/main" r:embed="rId27"/>
                 </a:ext>
               </a:extLst>
             </a:blip>
@@ -9673,7 +10096,7 @@
           <a:lstStyle/>
           <a:p>
             <a:r>
-              <a:rPr lang="en-US" altLang="ko-KR" sz="1100">
+              <a:rPr lang="en-US" altLang="ko-KR" sz="1100" dirty="0">
                 <a:latin typeface="Arial" panose="020B0604020202020204" pitchFamily="34" charset="0"/>
                 <a:ea typeface="Amazon Ember Light" panose="020B0403020204020204" pitchFamily="34" charset="0"/>
                 <a:cs typeface="Arial" panose="020B0604020202020204" pitchFamily="34" charset="0"/>
@@ -9817,6 +10240,52 @@
                 <a:srgbClr val="5B9CD5"/>
               </a:solidFill>
               <a:latin typeface="Arial" panose="020B0604020202020204" pitchFamily="34" charset="0"/>
+              <a:cs typeface="Arial" panose="020B0604020202020204" pitchFamily="34" charset="0"/>
+            </a:endParaRPr>
+          </a:p>
+        </p:txBody>
+      </p:sp>
+      <p:sp>
+        <p:nvSpPr>
+          <p:cNvPr id="101" name="TextBox 100">
+            <a:extLst>
+              <a:ext uri="{FF2B5EF4-FFF2-40B4-BE49-F238E27FC236}">
+                <a16:creationId xmlns:a16="http://schemas.microsoft.com/office/drawing/2014/main" id="{85DF7A1C-42C0-48F7-97B8-D170FB69DB21}"/>
+              </a:ext>
+            </a:extLst>
+          </p:cNvPr>
+          <p:cNvSpPr txBox="1"/>
+          <p:nvPr/>
+        </p:nvSpPr>
+        <p:spPr>
+          <a:xfrm>
+            <a:off x="7624765" y="3048336"/>
+            <a:ext cx="469838" cy="169277"/>
+          </a:xfrm>
+          <a:prstGeom prst="rect">
+            <a:avLst/>
+          </a:prstGeom>
+          <a:solidFill>
+            <a:srgbClr val="E9F3E6"/>
+          </a:solidFill>
+        </p:spPr>
+        <p:txBody>
+          <a:bodyPr wrap="square" lIns="0" tIns="0" rIns="0" bIns="0" rtlCol="0">
+            <a:spAutoFit/>
+          </a:bodyPr>
+          <a:lstStyle/>
+          <a:p>
+            <a:r>
+              <a:rPr lang="en-US" altLang="ko-KR" sz="1100" dirty="0">
+                <a:latin typeface="Arial" panose="020B0604020202020204" pitchFamily="34" charset="0"/>
+                <a:ea typeface="Amazon Ember Light" panose="020B0403020204020204" pitchFamily="34" charset="0"/>
+                <a:cs typeface="Arial" panose="020B0604020202020204" pitchFamily="34" charset="0"/>
+              </a:rPr>
+              <a:t>6.7.2.8</a:t>
+            </a:r>
+            <a:endParaRPr lang="ko-KR" altLang="en-US" sz="1100" dirty="0" err="1">
+              <a:latin typeface="Arial" panose="020B0604020202020204" pitchFamily="34" charset="0"/>
+              <a:ea typeface="Amazon Ember Light" panose="020B0403020204020204" pitchFamily="34" charset="0"/>
               <a:cs typeface="Arial" panose="020B0604020202020204" pitchFamily="34" charset="0"/>
             </a:endParaRPr>
           </a:p>
@@ -11885,6 +12354,41 @@
                                   </p:childTnLst>
                                 </p:cTn>
                               </p:par>
+                              <p:par>
+                                <p:cTn id="189" presetID="22" presetClass="entr" presetSubtype="8" fill="hold" grpId="0" nodeType="withEffect">
+                                  <p:stCondLst>
+                                    <p:cond delay="0"/>
+                                  </p:stCondLst>
+                                  <p:childTnLst>
+                                    <p:set>
+                                      <p:cBhvr>
+                                        <p:cTn id="190" dur="1" fill="hold">
+                                          <p:stCondLst>
+                                            <p:cond delay="0"/>
+                                          </p:stCondLst>
+                                        </p:cTn>
+                                        <p:tgtEl>
+                                          <p:spTgt spid="101"/>
+                                        </p:tgtEl>
+                                        <p:attrNameLst>
+                                          <p:attrName>style.visibility</p:attrName>
+                                        </p:attrNameLst>
+                                      </p:cBhvr>
+                                      <p:to>
+                                        <p:strVal val="visible"/>
+                                      </p:to>
+                                    </p:set>
+                                    <p:animEffect transition="in" filter="wipe(left)">
+                                      <p:cBhvr>
+                                        <p:cTn id="191" dur="500"/>
+                                        <p:tgtEl>
+                                          <p:spTgt spid="101"/>
+                                        </p:tgtEl>
+                                      </p:cBhvr>
+                                    </p:animEffect>
+                                  </p:childTnLst>
+                                </p:cTn>
+                              </p:par>
                             </p:childTnLst>
                           </p:cTn>
                         </p:par>
@@ -11892,26 +12396,26 @@
                     </p:cTn>
                   </p:par>
                   <p:par>
-                    <p:cTn id="189" fill="hold">
+                    <p:cTn id="192" fill="hold">
                       <p:stCondLst>
                         <p:cond delay="indefinite"/>
                       </p:stCondLst>
                       <p:childTnLst>
                         <p:par>
-                          <p:cTn id="190" fill="hold">
+                          <p:cTn id="193" fill="hold">
                             <p:stCondLst>
                               <p:cond delay="0"/>
                             </p:stCondLst>
                             <p:childTnLst>
                               <p:par>
-                                <p:cTn id="191" presetID="1" presetClass="entr" presetSubtype="0" fill="hold" grpId="0" nodeType="clickEffect">
+                                <p:cTn id="194" presetID="1" presetClass="entr" presetSubtype="0" fill="hold" grpId="0" nodeType="clickEffect">
                                   <p:stCondLst>
                                     <p:cond delay="0"/>
                                   </p:stCondLst>
                                   <p:childTnLst>
                                     <p:set>
                                       <p:cBhvr>
-                                        <p:cTn id="192" dur="1" fill="hold">
+                                        <p:cTn id="195" dur="1" fill="hold">
                                           <p:stCondLst>
                                             <p:cond delay="0"/>
                                           </p:stCondLst>
@@ -11937,26 +12441,26 @@
                     </p:cTn>
                   </p:par>
                   <p:par>
-                    <p:cTn id="193" fill="hold">
+                    <p:cTn id="196" fill="hold">
                       <p:stCondLst>
                         <p:cond delay="indefinite"/>
                       </p:stCondLst>
                       <p:childTnLst>
                         <p:par>
-                          <p:cTn id="194" fill="hold">
+                          <p:cTn id="197" fill="hold">
                             <p:stCondLst>
                               <p:cond delay="0"/>
                             </p:stCondLst>
                             <p:childTnLst>
                               <p:par>
-                                <p:cTn id="195" presetID="1" presetClass="entr" presetSubtype="0" fill="hold" grpId="0" nodeType="clickEffect">
+                                <p:cTn id="198" presetID="1" presetClass="entr" presetSubtype="0" fill="hold" grpId="0" nodeType="clickEffect">
                                   <p:stCondLst>
                                     <p:cond delay="0"/>
                                   </p:stCondLst>
                                   <p:childTnLst>
                                     <p:set>
                                       <p:cBhvr>
-                                        <p:cTn id="196" dur="1" fill="hold">
+                                        <p:cTn id="199" dur="1" fill="hold">
                                           <p:stCondLst>
                                             <p:cond delay="0"/>
                                           </p:stCondLst>
@@ -11976,14 +12480,14 @@
                                 </p:cTn>
                               </p:par>
                               <p:par>
-                                <p:cTn id="197" presetID="1" presetClass="entr" presetSubtype="0" fill="hold" grpId="0" nodeType="withEffect">
+                                <p:cTn id="200" presetID="1" presetClass="entr" presetSubtype="0" fill="hold" grpId="0" nodeType="withEffect">
                                   <p:stCondLst>
                                     <p:cond delay="0"/>
                                   </p:stCondLst>
                                   <p:childTnLst>
                                     <p:set>
                                       <p:cBhvr>
-                                        <p:cTn id="198" dur="1" fill="hold">
+                                        <p:cTn id="201" dur="1" fill="hold">
                                           <p:stCondLst>
                                             <p:cond delay="0"/>
                                           </p:stCondLst>
@@ -12009,26 +12513,26 @@
                     </p:cTn>
                   </p:par>
                   <p:par>
-                    <p:cTn id="199" fill="hold">
+                    <p:cTn id="202" fill="hold">
                       <p:stCondLst>
                         <p:cond delay="indefinite"/>
                       </p:stCondLst>
                       <p:childTnLst>
                         <p:par>
-                          <p:cTn id="200" fill="hold">
+                          <p:cTn id="203" fill="hold">
                             <p:stCondLst>
                               <p:cond delay="0"/>
                             </p:stCondLst>
                             <p:childTnLst>
                               <p:par>
-                                <p:cTn id="201" presetID="22" presetClass="entr" presetSubtype="4" fill="hold" nodeType="clickEffect">
+                                <p:cTn id="204" presetID="22" presetClass="entr" presetSubtype="4" fill="hold" nodeType="clickEffect">
                                   <p:stCondLst>
                                     <p:cond delay="0"/>
                                   </p:stCondLst>
                                   <p:childTnLst>
                                     <p:set>
                                       <p:cBhvr>
-                                        <p:cTn id="202" dur="1" fill="hold">
+                                        <p:cTn id="205" dur="1" fill="hold">
                                           <p:stCondLst>
                                             <p:cond delay="0"/>
                                           </p:stCondLst>
@@ -12046,7 +12550,7 @@
                                     </p:set>
                                     <p:animEffect transition="in" filter="wipe(down)">
                                       <p:cBhvr>
-                                        <p:cTn id="203" dur="500"/>
+                                        <p:cTn id="206" dur="500"/>
                                         <p:tgtEl>
                                           <p:spTgt spid="23"/>
                                         </p:tgtEl>
@@ -12062,26 +12566,26 @@
                     </p:cTn>
                   </p:par>
                   <p:par>
-                    <p:cTn id="204" fill="hold">
+                    <p:cTn id="207" fill="hold">
                       <p:stCondLst>
                         <p:cond delay="indefinite"/>
                       </p:stCondLst>
                       <p:childTnLst>
                         <p:par>
-                          <p:cTn id="205" fill="hold">
+                          <p:cTn id="208" fill="hold">
                             <p:stCondLst>
                               <p:cond delay="0"/>
                             </p:stCondLst>
                             <p:childTnLst>
                               <p:par>
-                                <p:cTn id="206" presetID="1" presetClass="entr" presetSubtype="0" fill="hold" grpId="0" nodeType="clickEffect">
+                                <p:cTn id="209" presetID="1" presetClass="entr" presetSubtype="0" fill="hold" grpId="0" nodeType="clickEffect">
                                   <p:stCondLst>
                                     <p:cond delay="0"/>
                                   </p:stCondLst>
                                   <p:childTnLst>
                                     <p:set>
                                       <p:cBhvr>
-                                        <p:cTn id="207" dur="1" fill="hold">
+                                        <p:cTn id="210" dur="1" fill="hold">
                                           <p:stCondLst>
                                             <p:cond delay="0"/>
                                           </p:stCondLst>
@@ -12107,26 +12611,26 @@
                     </p:cTn>
                   </p:par>
                   <p:par>
-                    <p:cTn id="208" fill="hold">
+                    <p:cTn id="211" fill="hold">
                       <p:stCondLst>
                         <p:cond delay="indefinite"/>
                       </p:stCondLst>
                       <p:childTnLst>
                         <p:par>
-                          <p:cTn id="209" fill="hold">
+                          <p:cTn id="212" fill="hold">
                             <p:stCondLst>
                               <p:cond delay="0"/>
                             </p:stCondLst>
                             <p:childTnLst>
                               <p:par>
-                                <p:cTn id="210" presetID="1" presetClass="entr" presetSubtype="0" fill="hold" grpId="0" nodeType="clickEffect">
+                                <p:cTn id="213" presetID="1" presetClass="entr" presetSubtype="0" fill="hold" grpId="0" nodeType="clickEffect">
                                   <p:stCondLst>
                                     <p:cond delay="0"/>
                                   </p:stCondLst>
                                   <p:childTnLst>
                                     <p:set>
                                       <p:cBhvr>
-                                        <p:cTn id="211" dur="1" fill="hold">
+                                        <p:cTn id="214" dur="1" fill="hold">
                                           <p:stCondLst>
                                             <p:cond delay="0"/>
                                           </p:stCondLst>
@@ -12152,26 +12656,26 @@
                     </p:cTn>
                   </p:par>
                   <p:par>
-                    <p:cTn id="212" fill="hold">
+                    <p:cTn id="215" fill="hold">
                       <p:stCondLst>
                         <p:cond delay="indefinite"/>
                       </p:stCondLst>
                       <p:childTnLst>
                         <p:par>
-                          <p:cTn id="213" fill="hold">
+                          <p:cTn id="216" fill="hold">
                             <p:stCondLst>
                               <p:cond delay="0"/>
                             </p:stCondLst>
                             <p:childTnLst>
                               <p:par>
-                                <p:cTn id="214" presetID="1" presetClass="entr" presetSubtype="0" fill="hold" nodeType="clickEffect">
+                                <p:cTn id="217" presetID="1" presetClass="entr" presetSubtype="0" fill="hold" nodeType="clickEffect">
                                   <p:stCondLst>
                                     <p:cond delay="0"/>
                                   </p:stCondLst>
                                   <p:childTnLst>
                                     <p:set>
                                       <p:cBhvr>
-                                        <p:cTn id="215" dur="1" fill="hold">
+                                        <p:cTn id="218" dur="1" fill="hold">
                                           <p:stCondLst>
                                             <p:cond delay="0"/>
                                           </p:stCondLst>
@@ -12197,26 +12701,26 @@
                     </p:cTn>
                   </p:par>
                   <p:par>
-                    <p:cTn id="216" fill="hold">
+                    <p:cTn id="219" fill="hold">
                       <p:stCondLst>
                         <p:cond delay="indefinite"/>
                       </p:stCondLst>
                       <p:childTnLst>
                         <p:par>
-                          <p:cTn id="217" fill="hold">
+                          <p:cTn id="220" fill="hold">
                             <p:stCondLst>
                               <p:cond delay="0"/>
                             </p:stCondLst>
                             <p:childTnLst>
                               <p:par>
-                                <p:cTn id="218" presetID="1" presetClass="entr" presetSubtype="0" fill="hold" grpId="0" nodeType="clickEffect">
+                                <p:cTn id="221" presetID="1" presetClass="entr" presetSubtype="0" fill="hold" grpId="0" nodeType="clickEffect">
                                   <p:stCondLst>
                                     <p:cond delay="0"/>
                                   </p:stCondLst>
                                   <p:childTnLst>
                                     <p:set>
                                       <p:cBhvr>
-                                        <p:cTn id="219" dur="1" fill="hold">
+                                        <p:cTn id="222" dur="1" fill="hold">
                                           <p:stCondLst>
                                             <p:cond delay="0"/>
                                           </p:stCondLst>
@@ -12242,26 +12746,26 @@
                     </p:cTn>
                   </p:par>
                   <p:par>
-                    <p:cTn id="220" fill="hold">
+                    <p:cTn id="223" fill="hold">
                       <p:stCondLst>
                         <p:cond delay="indefinite"/>
                       </p:stCondLst>
                       <p:childTnLst>
                         <p:par>
-                          <p:cTn id="221" fill="hold">
+                          <p:cTn id="224" fill="hold">
                             <p:stCondLst>
                               <p:cond delay="0"/>
                             </p:stCondLst>
                             <p:childTnLst>
                               <p:par>
-                                <p:cTn id="222" presetID="22" presetClass="entr" presetSubtype="4" fill="hold" grpId="0" nodeType="clickEffect">
+                                <p:cTn id="225" presetID="22" presetClass="entr" presetSubtype="4" fill="hold" grpId="0" nodeType="clickEffect">
                                   <p:stCondLst>
                                     <p:cond delay="0"/>
                                   </p:stCondLst>
                                   <p:childTnLst>
                                     <p:set>
                                       <p:cBhvr>
-                                        <p:cTn id="223" dur="1" fill="hold">
+                                        <p:cTn id="226" dur="1" fill="hold">
                                           <p:stCondLst>
                                             <p:cond delay="0"/>
                                           </p:stCondLst>
@@ -12279,7 +12783,7 @@
                                     </p:set>
                                     <p:animEffect transition="in" filter="wipe(down)">
                                       <p:cBhvr>
-                                        <p:cTn id="224" dur="500"/>
+                                        <p:cTn id="227" dur="500"/>
                                         <p:tgtEl>
                                           <p:spTgt spid="15"/>
                                         </p:tgtEl>
@@ -12295,26 +12799,26 @@
                     </p:cTn>
                   </p:par>
                   <p:par>
-                    <p:cTn id="225" fill="hold">
+                    <p:cTn id="228" fill="hold">
                       <p:stCondLst>
                         <p:cond delay="indefinite"/>
                       </p:stCondLst>
                       <p:childTnLst>
                         <p:par>
-                          <p:cTn id="226" fill="hold">
+                          <p:cTn id="229" fill="hold">
                             <p:stCondLst>
                               <p:cond delay="0"/>
                             </p:stCondLst>
                             <p:childTnLst>
                               <p:par>
-                                <p:cTn id="227" presetID="1" presetClass="entr" presetSubtype="0" fill="hold" grpId="0" nodeType="clickEffect">
+                                <p:cTn id="230" presetID="1" presetClass="entr" presetSubtype="0" fill="hold" grpId="0" nodeType="clickEffect">
                                   <p:stCondLst>
                                     <p:cond delay="0"/>
                                   </p:stCondLst>
                                   <p:childTnLst>
                                     <p:set>
                                       <p:cBhvr>
-                                        <p:cTn id="228" dur="1" fill="hold">
+                                        <p:cTn id="231" dur="1" fill="hold">
                                           <p:stCondLst>
                                             <p:cond delay="0"/>
                                           </p:stCondLst>
@@ -12340,26 +12844,26 @@
                     </p:cTn>
                   </p:par>
                   <p:par>
-                    <p:cTn id="229" fill="hold">
+                    <p:cTn id="232" fill="hold">
                       <p:stCondLst>
                         <p:cond delay="indefinite"/>
                       </p:stCondLst>
                       <p:childTnLst>
                         <p:par>
-                          <p:cTn id="230" fill="hold">
+                          <p:cTn id="233" fill="hold">
                             <p:stCondLst>
                               <p:cond delay="0"/>
                             </p:stCondLst>
                             <p:childTnLst>
                               <p:par>
-                                <p:cTn id="231" presetID="1" presetClass="entr" presetSubtype="0" fill="hold" grpId="0" nodeType="clickEffect">
+                                <p:cTn id="234" presetID="1" presetClass="entr" presetSubtype="0" fill="hold" grpId="0" nodeType="clickEffect">
                                   <p:stCondLst>
                                     <p:cond delay="0"/>
                                   </p:stCondLst>
                                   <p:childTnLst>
                                     <p:set>
                                       <p:cBhvr>
-                                        <p:cTn id="232" dur="1" fill="hold">
+                                        <p:cTn id="235" dur="1" fill="hold">
                                           <p:stCondLst>
                                             <p:cond delay="0"/>
                                           </p:stCondLst>
@@ -12385,26 +12889,26 @@
                     </p:cTn>
                   </p:par>
                   <p:par>
-                    <p:cTn id="233" fill="hold">
+                    <p:cTn id="236" fill="hold">
                       <p:stCondLst>
                         <p:cond delay="indefinite"/>
                       </p:stCondLst>
                       <p:childTnLst>
                         <p:par>
-                          <p:cTn id="234" fill="hold">
+                          <p:cTn id="237" fill="hold">
                             <p:stCondLst>
                               <p:cond delay="0"/>
                             </p:stCondLst>
                             <p:childTnLst>
                               <p:par>
-                                <p:cTn id="235" presetID="22" presetClass="entr" presetSubtype="4" fill="hold" nodeType="clickEffect">
+                                <p:cTn id="238" presetID="22" presetClass="entr" presetSubtype="4" fill="hold" nodeType="clickEffect">
                                   <p:stCondLst>
                                     <p:cond delay="0"/>
                                   </p:stCondLst>
                                   <p:childTnLst>
                                     <p:set>
                                       <p:cBhvr>
-                                        <p:cTn id="236" dur="1" fill="hold">
+                                        <p:cTn id="239" dur="1" fill="hold">
                                           <p:stCondLst>
                                             <p:cond delay="0"/>
                                           </p:stCondLst>
@@ -12422,7 +12926,7 @@
                                     </p:set>
                                     <p:animEffect transition="in" filter="wipe(down)">
                                       <p:cBhvr>
-                                        <p:cTn id="237" dur="500"/>
+                                        <p:cTn id="240" dur="500"/>
                                         <p:tgtEl>
                                           <p:spTgt spid="10"/>
                                         </p:tgtEl>
@@ -12438,26 +12942,26 @@
                     </p:cTn>
                   </p:par>
                   <p:par>
-                    <p:cTn id="238" fill="hold">
+                    <p:cTn id="241" fill="hold">
                       <p:stCondLst>
                         <p:cond delay="indefinite"/>
                       </p:stCondLst>
                       <p:childTnLst>
                         <p:par>
-                          <p:cTn id="239" fill="hold">
+                          <p:cTn id="242" fill="hold">
                             <p:stCondLst>
                               <p:cond delay="0"/>
                             </p:stCondLst>
                             <p:childTnLst>
                               <p:par>
-                                <p:cTn id="240" presetID="1" presetClass="entr" presetSubtype="0" fill="hold" grpId="0" nodeType="clickEffect">
+                                <p:cTn id="243" presetID="1" presetClass="entr" presetSubtype="0" fill="hold" grpId="0" nodeType="clickEffect">
                                   <p:stCondLst>
                                     <p:cond delay="0"/>
                                   </p:stCondLst>
                                   <p:childTnLst>
                                     <p:set>
                                       <p:cBhvr>
-                                        <p:cTn id="241" dur="1" fill="hold">
+                                        <p:cTn id="244" dur="1" fill="hold">
                                           <p:stCondLst>
                                             <p:cond delay="0"/>
                                           </p:stCondLst>
@@ -12483,26 +12987,26 @@
                     </p:cTn>
                   </p:par>
                   <p:par>
-                    <p:cTn id="242" fill="hold">
+                    <p:cTn id="245" fill="hold">
                       <p:stCondLst>
                         <p:cond delay="indefinite"/>
                       </p:stCondLst>
                       <p:childTnLst>
                         <p:par>
-                          <p:cTn id="243" fill="hold">
+                          <p:cTn id="246" fill="hold">
                             <p:stCondLst>
                               <p:cond delay="0"/>
                             </p:stCondLst>
                             <p:childTnLst>
                               <p:par>
-                                <p:cTn id="244" presetID="1" presetClass="entr" presetSubtype="0" fill="hold" grpId="0" nodeType="clickEffect">
+                                <p:cTn id="247" presetID="1" presetClass="entr" presetSubtype="0" fill="hold" grpId="0" nodeType="clickEffect">
                                   <p:stCondLst>
                                     <p:cond delay="0"/>
                                   </p:stCondLst>
                                   <p:childTnLst>
                                     <p:set>
                                       <p:cBhvr>
-                                        <p:cTn id="245" dur="1" fill="hold">
+                                        <p:cTn id="248" dur="1" fill="hold">
                                           <p:stCondLst>
                                             <p:cond delay="0"/>
                                           </p:stCondLst>
@@ -12573,6 +13077,7 @@
       <p:bldP spid="98" grpId="1" animBg="1"/>
       <p:bldP spid="99" grpId="0" animBg="1"/>
       <p:bldP spid="100" grpId="0" animBg="1"/>
+      <p:bldP spid="101" grpId="0" animBg="1"/>
     </p:bldLst>
   </p:timing>
 </p:sld>
@@ -12871,4 +13376,299 @@
     </a:ext>
   </a:extLst>
 </a:theme>
+</file>
+
+<file path=ppt/theme/theme2.xml><?xml version="1.0" encoding="utf-8"?>
+<a:theme xmlns:a="http://schemas.openxmlformats.org/drawingml/2006/main" name="Office 테마">
+  <a:themeElements>
+    <a:clrScheme name="Office">
+      <a:dk1>
+        <a:sysClr val="windowText" lastClr="000000"/>
+      </a:dk1>
+      <a:lt1>
+        <a:sysClr val="window" lastClr="FFFFFF"/>
+      </a:lt1>
+      <a:dk2>
+        <a:srgbClr val="44546A"/>
+      </a:dk2>
+      <a:lt2>
+        <a:srgbClr val="E7E6E6"/>
+      </a:lt2>
+      <a:accent1>
+        <a:srgbClr val="4472C4"/>
+      </a:accent1>
+      <a:accent2>
+        <a:srgbClr val="ED7D31"/>
+      </a:accent2>
+      <a:accent3>
+        <a:srgbClr val="A5A5A5"/>
+      </a:accent3>
+      <a:accent4>
+        <a:srgbClr val="FFC000"/>
+      </a:accent4>
+      <a:accent5>
+        <a:srgbClr val="5B9BD5"/>
+      </a:accent5>
+      <a:accent6>
+        <a:srgbClr val="70AD47"/>
+      </a:accent6>
+      <a:hlink>
+        <a:srgbClr val="0563C1"/>
+      </a:hlink>
+      <a:folHlink>
+        <a:srgbClr val="954F72"/>
+      </a:folHlink>
+    </a:clrScheme>
+    <a:fontScheme name="Office">
+      <a:majorFont>
+        <a:latin typeface="맑은 고딕" panose="020F0302020204030204"/>
+        <a:ea typeface=""/>
+        <a:cs typeface=""/>
+        <a:font script="Jpan" typeface="游ゴシック Light"/>
+        <a:font script="Hang" typeface="맑은 고딕"/>
+        <a:font script="Hans" typeface="等线 Light"/>
+        <a:font script="Hant" typeface="新細明體"/>
+        <a:font script="Arab" typeface="Times New Roman"/>
+        <a:font script="Hebr" typeface="Times New Roman"/>
+        <a:font script="Thai" typeface="Angsana New"/>
+        <a:font script="Ethi" typeface="Nyala"/>
+        <a:font script="Beng" typeface="Vrinda"/>
+        <a:font script="Gujr" typeface="Shruti"/>
+        <a:font script="Khmr" typeface="MoolBoran"/>
+        <a:font script="Knda" typeface="Tunga"/>
+        <a:font script="Guru" typeface="Raavi"/>
+        <a:font script="Cans" typeface="Euphemia"/>
+        <a:font script="Cher" typeface="Plantagenet Cherokee"/>
+        <a:font script="Yiii" typeface="Microsoft Yi Baiti"/>
+        <a:font script="Tibt" typeface="Microsoft Himalaya"/>
+        <a:font script="Thaa" typeface="MV Boli"/>
+        <a:font script="Deva" typeface="Mangal"/>
+        <a:font script="Telu" typeface="Gautami"/>
+        <a:font script="Taml" typeface="Latha"/>
+        <a:font script="Syrc" typeface="Estrangelo Edessa"/>
+        <a:font script="Orya" typeface="Kalinga"/>
+        <a:font script="Mlym" typeface="Kartika"/>
+        <a:font script="Laoo" typeface="DokChampa"/>
+        <a:font script="Sinh" typeface="Iskoola Pota"/>
+        <a:font script="Mong" typeface="Mongolian Baiti"/>
+        <a:font script="Viet" typeface="Times New Roman"/>
+        <a:font script="Uigh" typeface="Microsoft Uighur"/>
+        <a:font script="Geor" typeface="Sylfaen"/>
+        <a:font script="Armn" typeface="Arial"/>
+        <a:font script="Bugi" typeface="Leelawadee UI"/>
+        <a:font script="Bopo" typeface="Microsoft JhengHei"/>
+        <a:font script="Java" typeface="Javanese Text"/>
+        <a:font script="Lisu" typeface="Segoe UI"/>
+        <a:font script="Mymr" typeface="Myanmar Text"/>
+        <a:font script="Nkoo" typeface="Ebrima"/>
+        <a:font script="Olck" typeface="Nirmala UI"/>
+        <a:font script="Osma" typeface="Ebrima"/>
+        <a:font script="Phag" typeface="Phagspa"/>
+        <a:font script="Syrn" typeface="Estrangelo Edessa"/>
+        <a:font script="Syrj" typeface="Estrangelo Edessa"/>
+        <a:font script="Syre" typeface="Estrangelo Edessa"/>
+        <a:font script="Sora" typeface="Nirmala UI"/>
+        <a:font script="Tale" typeface="Microsoft Tai Le"/>
+        <a:font script="Talu" typeface="Microsoft New Tai Lue"/>
+        <a:font script="Tfng" typeface="Ebrima"/>
+      </a:majorFont>
+      <a:minorFont>
+        <a:latin typeface="맑은 고딕" panose="020F0502020204030204"/>
+        <a:ea typeface=""/>
+        <a:cs typeface=""/>
+        <a:font script="Jpan" typeface="游ゴシック"/>
+        <a:font script="Hang" typeface="맑은 고딕"/>
+        <a:font script="Hans" typeface="等线"/>
+        <a:font script="Hant" typeface="新細明體"/>
+        <a:font script="Arab" typeface="Arial"/>
+        <a:font script="Hebr" typeface="Arial"/>
+        <a:font script="Thai" typeface="Cordia New"/>
+        <a:font script="Ethi" typeface="Nyala"/>
+        <a:font script="Beng" typeface="Vrinda"/>
+        <a:font script="Gujr" typeface="Shruti"/>
+        <a:font script="Khmr" typeface="DaunPenh"/>
+        <a:font script="Knda" typeface="Tunga"/>
+        <a:font script="Guru" typeface="Raavi"/>
+        <a:font script="Cans" typeface="Euphemia"/>
+        <a:font script="Cher" typeface="Plantagenet Cherokee"/>
+        <a:font script="Yiii" typeface="Microsoft Yi Baiti"/>
+        <a:font script="Tibt" typeface="Microsoft Himalaya"/>
+        <a:font script="Thaa" typeface="MV Boli"/>
+        <a:font script="Deva" typeface="Mangal"/>
+        <a:font script="Telu" typeface="Gautami"/>
+        <a:font script="Taml" typeface="Latha"/>
+        <a:font script="Syrc" typeface="Estrangelo Edessa"/>
+        <a:font script="Orya" typeface="Kalinga"/>
+        <a:font script="Mlym" typeface="Kartika"/>
+        <a:font script="Laoo" typeface="DokChampa"/>
+        <a:font script="Sinh" typeface="Iskoola Pota"/>
+        <a:font script="Mong" typeface="Mongolian Baiti"/>
+        <a:font script="Viet" typeface="Arial"/>
+        <a:font script="Uigh" typeface="Microsoft Uighur"/>
+        <a:font script="Geor" typeface="Sylfaen"/>
+        <a:font script="Armn" typeface="Arial"/>
+        <a:font script="Bugi" typeface="Leelawadee UI"/>
+        <a:font script="Bopo" typeface="Microsoft JhengHei"/>
+        <a:font script="Java" typeface="Javanese Text"/>
+        <a:font script="Lisu" typeface="Segoe UI"/>
+        <a:font script="Mymr" typeface="Myanmar Text"/>
+        <a:font script="Nkoo" typeface="Ebrima"/>
+        <a:font script="Olck" typeface="Nirmala UI"/>
+        <a:font script="Osma" typeface="Ebrima"/>
+        <a:font script="Phag" typeface="Phagspa"/>
+        <a:font script="Syrn" typeface="Estrangelo Edessa"/>
+        <a:font script="Syrj" typeface="Estrangelo Edessa"/>
+        <a:font script="Syre" typeface="Estrangelo Edessa"/>
+        <a:font script="Sora" typeface="Nirmala UI"/>
+        <a:font script="Tale" typeface="Microsoft Tai Le"/>
+        <a:font script="Talu" typeface="Microsoft New Tai Lue"/>
+        <a:font script="Tfng" typeface="Ebrima"/>
+      </a:minorFont>
+    </a:fontScheme>
+    <a:fmtScheme name="Office">
+      <a:fillStyleLst>
+        <a:solidFill>
+          <a:schemeClr val="phClr"/>
+        </a:solidFill>
+        <a:gradFill rotWithShape="1">
+          <a:gsLst>
+            <a:gs pos="0">
+              <a:schemeClr val="phClr">
+                <a:lumMod val="110000"/>
+                <a:satMod val="105000"/>
+                <a:tint val="67000"/>
+              </a:schemeClr>
+            </a:gs>
+            <a:gs pos="50000">
+              <a:schemeClr val="phClr">
+                <a:lumMod val="105000"/>
+                <a:satMod val="103000"/>
+                <a:tint val="73000"/>
+              </a:schemeClr>
+            </a:gs>
+            <a:gs pos="100000">
+              <a:schemeClr val="phClr">
+                <a:lumMod val="105000"/>
+                <a:satMod val="109000"/>
+                <a:tint val="81000"/>
+              </a:schemeClr>
+            </a:gs>
+          </a:gsLst>
+          <a:lin ang="5400000" scaled="0"/>
+        </a:gradFill>
+        <a:gradFill rotWithShape="1">
+          <a:gsLst>
+            <a:gs pos="0">
+              <a:schemeClr val="phClr">
+                <a:satMod val="103000"/>
+                <a:lumMod val="102000"/>
+                <a:tint val="94000"/>
+              </a:schemeClr>
+            </a:gs>
+            <a:gs pos="50000">
+              <a:schemeClr val="phClr">
+                <a:satMod val="110000"/>
+                <a:lumMod val="100000"/>
+                <a:shade val="100000"/>
+              </a:schemeClr>
+            </a:gs>
+            <a:gs pos="100000">
+              <a:schemeClr val="phClr">
+                <a:lumMod val="99000"/>
+                <a:satMod val="120000"/>
+                <a:shade val="78000"/>
+              </a:schemeClr>
+            </a:gs>
+          </a:gsLst>
+          <a:lin ang="5400000" scaled="0"/>
+        </a:gradFill>
+      </a:fillStyleLst>
+      <a:lnStyleLst>
+        <a:ln w="6350" cap="flat" cmpd="sng" algn="ctr">
+          <a:solidFill>
+            <a:schemeClr val="phClr"/>
+          </a:solidFill>
+          <a:prstDash val="solid"/>
+          <a:miter lim="800000"/>
+        </a:ln>
+        <a:ln w="12700" cap="flat" cmpd="sng" algn="ctr">
+          <a:solidFill>
+            <a:schemeClr val="phClr"/>
+          </a:solidFill>
+          <a:prstDash val="solid"/>
+          <a:miter lim="800000"/>
+        </a:ln>
+        <a:ln w="19050" cap="flat" cmpd="sng" algn="ctr">
+          <a:solidFill>
+            <a:schemeClr val="phClr"/>
+          </a:solidFill>
+          <a:prstDash val="solid"/>
+          <a:miter lim="800000"/>
+        </a:ln>
+      </a:lnStyleLst>
+      <a:effectStyleLst>
+        <a:effectStyle>
+          <a:effectLst/>
+        </a:effectStyle>
+        <a:effectStyle>
+          <a:effectLst/>
+        </a:effectStyle>
+        <a:effectStyle>
+          <a:effectLst>
+            <a:outerShdw blurRad="57150" dist="19050" dir="5400000" algn="ctr" rotWithShape="0">
+              <a:srgbClr val="000000">
+                <a:alpha val="63000"/>
+              </a:srgbClr>
+            </a:outerShdw>
+          </a:effectLst>
+        </a:effectStyle>
+      </a:effectStyleLst>
+      <a:bgFillStyleLst>
+        <a:solidFill>
+          <a:schemeClr val="phClr"/>
+        </a:solidFill>
+        <a:solidFill>
+          <a:schemeClr val="phClr">
+            <a:tint val="95000"/>
+            <a:satMod val="170000"/>
+          </a:schemeClr>
+        </a:solidFill>
+        <a:gradFill rotWithShape="1">
+          <a:gsLst>
+            <a:gs pos="0">
+              <a:schemeClr val="phClr">
+                <a:tint val="93000"/>
+                <a:satMod val="150000"/>
+                <a:shade val="98000"/>
+                <a:lumMod val="102000"/>
+              </a:schemeClr>
+            </a:gs>
+            <a:gs pos="50000">
+              <a:schemeClr val="phClr">
+                <a:tint val="98000"/>
+                <a:satMod val="130000"/>
+                <a:shade val="90000"/>
+                <a:lumMod val="103000"/>
+              </a:schemeClr>
+            </a:gs>
+            <a:gs pos="100000">
+              <a:schemeClr val="phClr">
+                <a:shade val="63000"/>
+                <a:satMod val="120000"/>
+              </a:schemeClr>
+            </a:gs>
+          </a:gsLst>
+          <a:lin ang="5400000" scaled="0"/>
+        </a:gradFill>
+      </a:bgFillStyleLst>
+    </a:fmtScheme>
+  </a:themeElements>
+  <a:objectDefaults/>
+  <a:extraClrSchemeLst/>
+  <a:extLst>
+    <a:ext uri="{05A4C25C-085E-4340-85A3-A5531E510DB2}">
+      <thm15:themeFamily xmlns:thm15="http://schemas.microsoft.com/office/thememl/2012/main" name="Office Theme" id="{62F939B6-93AF-4DB8-9C6B-D6C7DFDC589F}" vid="{4A3C46E8-61CC-4603-A589-7422A47A8E4A}"/>
+    </a:ext>
+  </a:extLst>
+</a:theme>
 </file>